--- a/files/Aethic_Reasoning_60min.pptx
+++ b/files/Aethic_Reasoning_60min.pptx
@@ -2304,10 +2304,8 @@
           <a:lstStyle/>
           <a:p>
             <a:r>
-              <a:rPr lang="en-US" dirty="0"/>
-              <a:t>Assign a cluster of alternatives the vector sum over its paths of e to the iS over h-bar times the readout configuration ket. Then, axiom by axiom. States are rays. Superposition is the union of clusters in the agreeing regime. Observables are the partitions records induce. The Born rule is the weight of a record-restricted cluster. The projection postulate is pruning then renormalization. Composites are products of path spaces. Evolution is the kernel's composition law. No-signalling is an identity. Six theorems; the seventh absorbed.</a:t>
-            </a:r>
-            <a:endParaRPr lang="en-US" dirty="0"/>
+              <a:t>Assign a cluster of alternatives the vector sum over its paths of e to the iS over h-bar times the readout configuration ket. Then, axiom by axiom — and graded, because the grading is the honest part. Observables are the partitions records induce, and the projection postulate is pruning then renormalization: those two are theorems of the second and third postulates. States as rays, superposition as the union of clusters, composites as products, unitary evolution: those four are the kernel axiom's own content — you read them off the assignment, and unitarity in particular is posited with the kernel, since the composition law alone only gives a semigroup. The Born rule is the weight of a record-restricted cluster, absorbed. No-signalling is an identity. So: two theorems, four kernel content, one absorbed — and no measurement, projection, or observables axiom anywhere.</a:t>
+            </a:r>
           </a:p>
         </p:txBody>
       </p:sp>
@@ -3888,10 +3886,8 @@
           <a:lstStyle/>
           <a:p>
             <a:r>
-              <a:rPr lang="en-US" dirty="0"/>
               <a:t>Three postulates, one kernel, no measurement axiom. The axiomatization is a thirty-page paper; the compressed framework is thirty more; and every claim tonight is priced on a ledger with its falsifier. Thank you — and I'd rather take a hard question than an easy one.</a:t>
             </a:r>
-            <a:endParaRPr lang="en-US" dirty="0"/>
           </a:p>
         </p:txBody>
       </p:sp>
@@ -14348,6 +14344,10 @@
             <a:prstDash val="solid"/>
           </a:ln>
         </p:spPr>
+        <p:txBody>
+          <a:bodyPr/>
+          <a:p/>
+        </p:txBody>
       </p:sp>
       <p:sp>
         <p:nvSpPr>
@@ -14635,7 +14635,7 @@
                           <a:ea typeface="Calibri" pitchFamily="34" charset="-122"/>
                           <a:cs typeface="Calibri" pitchFamily="34" charset="-120"/>
                         </a:rPr>
-                        <a:t>the cluster vector, up to phase and conjugation — theorem</a:t>
+                        <a:t>the cluster vector, up to phase and conjugation — kernel content</a:t>
                       </a:r>
                       <a:endParaRPr lang="en-US" sz="1150" dirty="0">
                         <a:latin typeface="Calibri" charset="0"/>
@@ -14767,7 +14767,7 @@
                           <a:ea typeface="Calibri" pitchFamily="34" charset="-122"/>
                           <a:cs typeface="Calibri" pitchFamily="34" charset="-120"/>
                         </a:rPr>
-                        <a:t>the union of clusters in the agreeing regime — theorem</a:t>
+                        <a:t>the union of clusters in the agreeing regime — kernel content</a:t>
                       </a:r>
                       <a:endParaRPr lang="en-US" sz="1150" dirty="0">
                         <a:latin typeface="Calibri" charset="0"/>
@@ -14899,7 +14899,7 @@
                           <a:ea typeface="Calibri" pitchFamily="34" charset="-122"/>
                           <a:cs typeface="Calibri" pitchFamily="34" charset="-120"/>
                         </a:rPr>
-                        <a:t>the partitions that records induce — theorem</a:t>
+                        <a:t>the partitions that records induce — theorem of P2–P3</a:t>
                       </a:r>
                       <a:endParaRPr lang="en-US" sz="1150" dirty="0">
                         <a:latin typeface="Calibri" charset="0"/>
@@ -15163,7 +15163,7 @@
                           <a:ea typeface="Calibri" pitchFamily="34" charset="-122"/>
                           <a:cs typeface="Calibri" pitchFamily="34" charset="-120"/>
                         </a:rPr>
-                        <a:t>consistency-pruning followed by renormalization — theorem</a:t>
+                        <a:t>consistency-pruning followed by renormalization — theorem of P3; Lüders's form selected</a:t>
                       </a:r>
                       <a:endParaRPr lang="en-US" sz="1150" dirty="0">
                         <a:latin typeface="Calibri" charset="0"/>
@@ -15295,7 +15295,7 @@
                           <a:ea typeface="Calibri" pitchFamily="34" charset="-122"/>
                           <a:cs typeface="Calibri" pitchFamily="34" charset="-120"/>
                         </a:rPr>
-                        <a:t>products of path spaces — theorem</a:t>
+                        <a:t>products of path spaces — kernel content</a:t>
                       </a:r>
                       <a:endParaRPr lang="en-US" sz="1150" dirty="0">
                         <a:latin typeface="Calibri" charset="0"/>
@@ -15427,7 +15427,7 @@
                           <a:ea typeface="Calibri" pitchFamily="34" charset="-122"/>
                           <a:cs typeface="Calibri" pitchFamily="34" charset="-120"/>
                         </a:rPr>
-                        <a:t>the kernel's composition law — theorem</a:t>
+                        <a:t>the kernel's composition law, unitarity posited with the kernel</a:t>
                       </a:r>
                       <a:endParaRPr lang="en-US" sz="1150" dirty="0">
                         <a:latin typeface="Calibri" charset="0"/>
@@ -15645,7 +15645,7 @@
                 <a:ea typeface="Cambria" pitchFamily="34" charset="-122"/>
                 <a:cs typeface="Cambria" pitchFamily="34" charset="-120"/>
               </a:rPr>
-              <a:t>Six of seven as theorems; the Born rule absorbed. No measurement, projection, or observables axiom remains.</a:t>
+              <a:t>Two theorems of the postulates, four the kernel's own content, the Born rule absorbed. No measurement, projection, or observables axiom remains.</a:t>
             </a:r>
             <a:endParaRPr lang="en-US" sz="1350" dirty="0"/>
           </a:p>
@@ -24682,6 +24682,10 @@
             <a:prstDash val="solid"/>
           </a:ln>
         </p:spPr>
+        <p:txBody>
+          <a:bodyPr/>
+          <a:p/>
+        </p:txBody>
       </p:sp>
       <p:sp>
         <p:nvSpPr>
@@ -24797,7 +24801,7 @@
                 <a:ea typeface="Calibri" pitchFamily="34" charset="-122"/>
                 <a:cs typeface="Calibri" pitchFamily="34" charset="-120"/>
               </a:rPr>
-              <a:t>Determinacy is a two-place relation. Blanks are open. Exclusion is written by records. A superposition any record could contradict is invalid now. Add Feynman's phase in pairs, and the formalism comes back with six axioms as theorems and the seventh absorbed.</a:t>
+              <a:t>Determinacy is a two-place relation. Blanks are open. Exclusion is written by records. A superposition any record could contradict is invalid now. Add Feynman's phase in pairs, and the formalism comes back — observables and projection as theorems, the state space as the kernel's own content, the Born rule absorbed.</a:t>
             </a:r>
             <a:endParaRPr lang="en-US" sz="1400" dirty="0"/>
           </a:p>
